--- a/exports/pptx/lessons/primary-module-01-what-is-iks/day-03-yoga.pptx
+++ b/exports/pptx/lessons/primary-module-01-what-is-iks/day-03-yoga.pptx
@@ -16,9 +16,11 @@
     <p:sldId id="264" r:id="rId10"/>
     <p:sldId id="265" r:id="rId11"/>
     <p:sldId id="266" r:id="rId12"/>
+    <p:sldId id="267" r:id="rId13"/>
+    <p:sldId id="268" r:id="rId14"/>
   </p:sldIdLst>
   <p:notesMasterIdLst>
-    <p:notesMasterId r:id="rId13"/>
+    <p:notesMasterId r:id="rId15"/>
   </p:notesMasterIdLst>
   <p:sldSz cx="9144000" cy="5143500"/>
   <p:notesSz cx="5143500" cy="9144000"/>
@@ -712,6 +714,182 @@
             <a:fld id="{F7021451-1387-4CA6-816F-3879F97B5CBC}" type="slidenum">
               <a:rPr lang="en-US"/>
               <a:t>11</a:t>
+            </a:fld>
+            <a:endParaRPr lang="en-US"/>
+          </a:p>
+        </p:txBody>
+      </p:sp>
+    </p:spTree>
+    <p:extLst>
+      <p:ext uri="{BB962C8B-B14F-4D97-AF65-F5344CB8AC3E}">
+        <p14:creationId xmlns:p14="http://schemas.microsoft.com/office/powerpoint/2010/main" val="1024086991"/>
+      </p:ext>
+    </p:extLst>
+  </p:cSld>
+  <p:clrMapOvr>
+    <a:masterClrMapping/>
+  </p:clrMapOvr>
+</p:notes>
+</file>
+
+<file path=ppt/notesSlides/notesSlide12.xml><?xml version="1.0" encoding="utf-8"?>
+<p:notes xmlns:a="http://schemas.openxmlformats.org/drawingml/2006/main" xmlns:r="http://schemas.openxmlformats.org/officeDocument/2006/relationships" xmlns:p="http://schemas.openxmlformats.org/presentationml/2006/main">
+  <p:cSld>
+    <p:spTree>
+      <p:nvGrpSpPr>
+        <p:cNvPr id="1" name=""/>
+        <p:cNvGrpSpPr/>
+        <p:nvPr/>
+      </p:nvGrpSpPr>
+      <p:grpSpPr>
+        <a:xfrm>
+          <a:off x="0" y="0"/>
+          <a:ext cx="0" cy="0"/>
+          <a:chOff x="0" y="0"/>
+          <a:chExt cx="0" cy="0"/>
+        </a:xfrm>
+      </p:grpSpPr>
+      <p:sp>
+        <p:nvSpPr>
+          <p:cNvPr id="2" name="Slide Image Placeholder 1"/>
+          <p:cNvSpPr>
+            <a:spLocks noGrp="1" noRot="1" noChangeAspect="1"/>
+          </p:cNvSpPr>
+          <p:nvPr>
+            <p:ph type="sldImg"/>
+          </p:nvPr>
+        </p:nvSpPr>
+        <p:spPr/>
+      </p:sp>
+      <p:sp>
+        <p:nvSpPr>
+          <p:cNvPr id="3" name="Notes Placeholder 2"/>
+          <p:cNvSpPr>
+            <a:spLocks noGrp="1"/>
+          </p:cNvSpPr>
+          <p:nvPr>
+            <p:ph type="body" idx="1"/>
+          </p:nvPr>
+        </p:nvSpPr>
+        <p:spPr/>
+        <p:txBody>
+          <a:bodyPr/>
+          <a:lstStyle/>
+          <a:p>
+            <a:r>
+              <a:rPr lang="en-US" dirty="0"/>
+              <a:t/>
+            </a:r>
+            <a:endParaRPr lang="en-US" dirty="0"/>
+          </a:p>
+        </p:txBody>
+      </p:sp>
+      <p:sp>
+        <p:nvSpPr>
+          <p:cNvPr id="4" name="Slide Number Placeholder 3"/>
+          <p:cNvSpPr>
+            <a:spLocks noGrp="1"/>
+          </p:cNvSpPr>
+          <p:nvPr>
+            <p:ph type="sldNum" sz="quarter" idx="10"/>
+          </p:nvPr>
+        </p:nvSpPr>
+        <p:spPr/>
+        <p:txBody>
+          <a:bodyPr/>
+          <a:lstStyle/>
+          <a:p>
+            <a:fld id="{F7021451-1387-4CA6-816F-3879F97B5CBC}" type="slidenum">
+              <a:rPr lang="en-US"/>
+              <a:t>12</a:t>
+            </a:fld>
+            <a:endParaRPr lang="en-US"/>
+          </a:p>
+        </p:txBody>
+      </p:sp>
+    </p:spTree>
+    <p:extLst>
+      <p:ext uri="{BB962C8B-B14F-4D97-AF65-F5344CB8AC3E}">
+        <p14:creationId xmlns:p14="http://schemas.microsoft.com/office/powerpoint/2010/main" val="1024086991"/>
+      </p:ext>
+    </p:extLst>
+  </p:cSld>
+  <p:clrMapOvr>
+    <a:masterClrMapping/>
+  </p:clrMapOvr>
+</p:notes>
+</file>
+
+<file path=ppt/notesSlides/notesSlide13.xml><?xml version="1.0" encoding="utf-8"?>
+<p:notes xmlns:a="http://schemas.openxmlformats.org/drawingml/2006/main" xmlns:r="http://schemas.openxmlformats.org/officeDocument/2006/relationships" xmlns:p="http://schemas.openxmlformats.org/presentationml/2006/main">
+  <p:cSld>
+    <p:spTree>
+      <p:nvGrpSpPr>
+        <p:cNvPr id="1" name=""/>
+        <p:cNvGrpSpPr/>
+        <p:nvPr/>
+      </p:nvGrpSpPr>
+      <p:grpSpPr>
+        <a:xfrm>
+          <a:off x="0" y="0"/>
+          <a:ext cx="0" cy="0"/>
+          <a:chOff x="0" y="0"/>
+          <a:chExt cx="0" cy="0"/>
+        </a:xfrm>
+      </p:grpSpPr>
+      <p:sp>
+        <p:nvSpPr>
+          <p:cNvPr id="2" name="Slide Image Placeholder 1"/>
+          <p:cNvSpPr>
+            <a:spLocks noGrp="1" noRot="1" noChangeAspect="1"/>
+          </p:cNvSpPr>
+          <p:nvPr>
+            <p:ph type="sldImg"/>
+          </p:nvPr>
+        </p:nvSpPr>
+        <p:spPr/>
+      </p:sp>
+      <p:sp>
+        <p:nvSpPr>
+          <p:cNvPr id="3" name="Notes Placeholder 2"/>
+          <p:cNvSpPr>
+            <a:spLocks noGrp="1"/>
+          </p:cNvSpPr>
+          <p:nvPr>
+            <p:ph type="body" idx="1"/>
+          </p:nvPr>
+        </p:nvSpPr>
+        <p:spPr/>
+        <p:txBody>
+          <a:bodyPr/>
+          <a:lstStyle/>
+          <a:p>
+            <a:r>
+              <a:rPr lang="en-US" dirty="0"/>
+              <a:t/>
+            </a:r>
+            <a:endParaRPr lang="en-US" dirty="0"/>
+          </a:p>
+        </p:txBody>
+      </p:sp>
+      <p:sp>
+        <p:nvSpPr>
+          <p:cNvPr id="4" name="Slide Number Placeholder 3"/>
+          <p:cNvSpPr>
+            <a:spLocks noGrp="1"/>
+          </p:cNvSpPr>
+          <p:nvPr>
+            <p:ph type="sldNum" sz="quarter" idx="10"/>
+          </p:nvPr>
+        </p:nvSpPr>
+        <p:spPr/>
+        <p:txBody>
+          <a:bodyPr/>
+          <a:lstStyle/>
+          <a:p>
+            <a:fld id="{F7021451-1387-4CA6-816F-3879F97B5CBC}" type="slidenum">
+              <a:rPr lang="en-US"/>
+              <a:t>13</a:t>
             </a:fld>
             <a:endParaRPr lang="en-US"/>
           </a:p>
@@ -1965,102 +2143,6 @@
         </p:nvSpPr>
         <p:spPr>
           <a:xfrm>
-            <a:off x="406301" y="1223963"/>
-            <a:ext cx="8498026" cy="274290"/>
-          </a:xfrm>
-          <a:prstGeom prst="rect">
-            <a:avLst/>
-          </a:prstGeom>
-          <a:noFill/>
-          <a:ln/>
-        </p:spPr>
-        <p:txBody>
-          <a:bodyPr wrap="square" lIns="0" tIns="0" rIns="0" bIns="0" rtlCol="0" anchor="t"/>
-          <a:lstStyle/>
-          <a:p>
-            <a:pPr algn="l" indent="0" marL="0">
-              <a:lnSpc>
-                <a:spcPts val="2160"/>
-              </a:lnSpc>
-              <a:spcBef>
-                <a:spcPts val="600"/>
-              </a:spcBef>
-              <a:spcAft>
-                <a:spcPts val="800"/>
-              </a:spcAft>
-              <a:buNone/>
-            </a:pPr>
-            <a:r>
-              <a:rPr lang="en-US" sz="1800" b="1" dirty="0">
-                <a:solidFill>
-                  <a:srgbClr val="E07A5F"/>
-                </a:solidFill>
-                <a:latin typeface="Georgia" pitchFamily="34" charset="0"/>
-                <a:ea typeface="Georgia" pitchFamily="34" charset="-122"/>
-                <a:cs typeface="Georgia" pitchFamily="34" charset="-120"/>
-              </a:rPr>
-              <a:t>Goal</a:t>
-            </a:r>
-            <a:endParaRPr lang="en-US" sz="1800" dirty="0"/>
-          </a:p>
-        </p:txBody>
-      </p:sp>
-      <p:sp>
-        <p:nvSpPr>
-          <p:cNvPr id="6" name="Text 4"/>
-          <p:cNvSpPr/>
-          <p:nvPr/>
-        </p:nvSpPr>
-        <p:spPr>
-          <a:xfrm>
-            <a:off x="406301" y="1637854"/>
-            <a:ext cx="8498026" cy="213271"/>
-          </a:xfrm>
-          <a:prstGeom prst="rect">
-            <a:avLst/>
-          </a:prstGeom>
-          <a:noFill/>
-          <a:ln/>
-        </p:spPr>
-        <p:txBody>
-          <a:bodyPr wrap="square" lIns="0" tIns="0" rIns="0" bIns="0" rtlCol="0" anchor="t"/>
-          <a:lstStyle/>
-          <a:p>
-            <a:pPr algn="l" indent="0" marL="0">
-              <a:lnSpc>
-                <a:spcPts val="1680"/>
-              </a:lnSpc>
-              <a:spcBef>
-                <a:spcPts val="300"/>
-              </a:spcBef>
-              <a:spcAft>
-                <a:spcPts val="300"/>
-              </a:spcAft>
-              <a:buNone/>
-            </a:pPr>
-            <a:r>
-              <a:rPr lang="en-US" sz="1200" dirty="0">
-                <a:solidFill>
-                  <a:srgbClr val="2C2C2C"/>
-                </a:solidFill>
-                <a:latin typeface="Verdana" pitchFamily="34" charset="0"/>
-                <a:ea typeface="Verdana" pitchFamily="34" charset="-122"/>
-                <a:cs typeface="Verdana" pitchFamily="34" charset="-120"/>
-              </a:rPr>
-              <a:t>Children try ONE yoga pose with breath co-ordination.</a:t>
-            </a:r>
-            <a:endParaRPr lang="en-US" sz="1200" dirty="0"/>
-          </a:p>
-        </p:txBody>
-      </p:sp>
-      <p:sp>
-        <p:nvSpPr>
-          <p:cNvPr id="7" name="Text 5"/>
-          <p:cNvSpPr/>
-          <p:nvPr/>
-        </p:nvSpPr>
-        <p:spPr>
-          <a:xfrm>
             <a:off x="406301" y="4434929"/>
             <a:ext cx="8498026" cy="213271"/>
           </a:xfrm>
@@ -2205,7 +2287,7 @@
                 <a:ea typeface="Georgia" pitchFamily="34" charset="-122"/>
                 <a:cs typeface="Georgia" pitchFamily="34" charset="-120"/>
               </a:rPr>
-              <a:t>Differentiation</a:t>
+              <a:t>Wrap-up (2 min)</a:t>
             </a:r>
             <a:endParaRPr lang="en-US" sz="1800" dirty="0"/>
           </a:p>
@@ -2220,7 +2302,7 @@
         <p:spPr>
           <a:xfrm>
             <a:off x="634901" y="883593"/>
-            <a:ext cx="8102798" cy="525661"/>
+            <a:ext cx="8102798" cy="487561"/>
           </a:xfrm>
           <a:prstGeom prst="rect">
             <a:avLst/>
@@ -2243,7 +2325,7 @@
               <a:buChar char="•"/>
             </a:pPr>
             <a:r>
-              <a:rPr lang="en-US" sz="1200" b="1" dirty="0">
+              <a:rPr lang="en-US" sz="1200" i="1" dirty="0">
                 <a:solidFill>
                   <a:srgbClr val="2C2C2C"/>
                 </a:solidFill>
@@ -2251,71 +2333,7 @@
                 <a:ea typeface="Verdana" pitchFamily="34" charset="-122"/>
                 <a:cs typeface="Verdana" pitchFamily="34" charset="-120"/>
               </a:rPr>
-              <a:t>Tier up:</a:t>
-            </a:r>
-            <a:pPr algn="l" indent="0" marL="0">
-              <a:lnSpc>
-                <a:spcPts val="1620"/>
-              </a:lnSpc>
-              <a:spcAft>
-                <a:spcPts val="300"/>
-              </a:spcAft>
-              <a:buNone/>
-            </a:pPr>
-            <a:r>
-              <a:rPr lang="en-US" sz="1200" dirty="0">
-                <a:solidFill>
-                  <a:srgbClr val="2C2C2C"/>
-                </a:solidFill>
-                <a:latin typeface="Verdana" pitchFamily="34" charset="0"/>
-                <a:ea typeface="Verdana" pitchFamily="34" charset="-122"/>
-                <a:cs typeface="Verdana" pitchFamily="34" charset="-120"/>
-              </a:rPr>
-              <a:t> Add tree pose (vṛkṣāsana).</a:t>
-            </a:r>
-            <a:endParaRPr lang="en-US" sz="1200" dirty="0"/>
-          </a:p>
-          <a:p>
-            <a:pPr algn="l" marL="342900" indent="-342900">
-              <a:lnSpc>
-                <a:spcPts val="1620"/>
-              </a:lnSpc>
-              <a:spcAft>
-                <a:spcPts val="300"/>
-              </a:spcAft>
-              <a:buSzPct val="100000"/>
-              <a:buChar char="•"/>
-            </a:pPr>
-            <a:r>
-              <a:rPr lang="en-US" sz="1200" b="1" dirty="0">
-                <a:solidFill>
-                  <a:srgbClr val="2C2C2C"/>
-                </a:solidFill>
-                <a:latin typeface="Verdana" pitchFamily="34" charset="0"/>
-                <a:ea typeface="Verdana" pitchFamily="34" charset="-122"/>
-                <a:cs typeface="Verdana" pitchFamily="34" charset="-120"/>
-              </a:rPr>
-              <a:t>Tier down:</a:t>
-            </a:r>
-            <a:pPr algn="l" indent="0" marL="0">
-              <a:lnSpc>
-                <a:spcPts val="1620"/>
-              </a:lnSpc>
-              <a:spcAft>
-                <a:spcPts val="300"/>
-              </a:spcAft>
-              <a:buNone/>
-            </a:pPr>
-            <a:r>
-              <a:rPr lang="en-US" sz="1200" dirty="0">
-                <a:solidFill>
-                  <a:srgbClr val="2C2C2C"/>
-                </a:solidFill>
-                <a:latin typeface="Verdana" pitchFamily="34" charset="0"/>
-                <a:ea typeface="Verdana" pitchFamily="34" charset="-122"/>
-                <a:cs typeface="Verdana" pitchFamily="34" charset="-120"/>
-              </a:rPr>
-              <a:t> Just do mountain pose, no breath.</a:t>
+              <a:t>"When you feel angry or sad — try mountain pose for 30 seconds. Or 3 bumblebee breaths. Yoga is a TOOL you can carry with you."</a:t>
             </a:r>
             <a:endParaRPr lang="en-US" sz="1200" dirty="0"/>
           </a:p>
@@ -2473,7 +2491,7 @@
                 <a:ea typeface="Georgia" pitchFamily="34" charset="-122"/>
                 <a:cs typeface="Georgia" pitchFamily="34" charset="-120"/>
               </a:rPr>
-              <a:t>Teacher notes</a:t>
+              <a:t>Homework</a:t>
             </a:r>
             <a:endParaRPr lang="en-US" sz="1800" dirty="0"/>
           </a:p>
@@ -2487,8 +2505,8 @@
         </p:nvSpPr>
         <p:spPr>
           <a:xfrm>
-            <a:off x="406301" y="870942"/>
-            <a:ext cx="8498026" cy="213271"/>
+            <a:off x="634901" y="883593"/>
+            <a:ext cx="8102798" cy="281880"/>
           </a:xfrm>
           <a:prstGeom prst="rect">
             <a:avLst/>
@@ -2500,17 +2518,15 @@
           <a:bodyPr wrap="square" lIns="0" tIns="0" rIns="0" bIns="0" rtlCol="0" anchor="t"/>
           <a:lstStyle/>
           <a:p>
-            <a:pPr algn="l" indent="0" marL="0">
-              <a:lnSpc>
-                <a:spcPts val="1680"/>
-              </a:lnSpc>
-              <a:spcBef>
-                <a:spcPts val="300"/>
-              </a:spcBef>
-              <a:spcAft>
-                <a:spcPts val="300"/>
-              </a:spcAft>
-              <a:buNone/>
+            <a:pPr algn="l" marL="342900" indent="-342900">
+              <a:lnSpc>
+                <a:spcPts val="1620"/>
+              </a:lnSpc>
+              <a:spcAft>
+                <a:spcPts val="300"/>
+              </a:spcAft>
+              <a:buSzPct val="100000"/>
+              <a:buChar char="•"/>
             </a:pPr>
             <a:r>
               <a:rPr lang="en-US" sz="1200" dirty="0">
@@ -2521,7 +2537,479 @@
                 <a:ea typeface="Verdana" pitchFamily="34" charset="-122"/>
                 <a:cs typeface="Verdana" pitchFamily="34" charset="-120"/>
               </a:rPr>
-              <a:t>– Module 8 is the FULL yoga module. Today is just a taste.</a:t>
+              <a:t>Stand like a mountain for 30 seconds before brushing your teeth tomorrow.</a:t>
+            </a:r>
+            <a:endParaRPr lang="en-US" sz="1200" dirty="0"/>
+          </a:p>
+        </p:txBody>
+      </p:sp>
+      <p:sp>
+        <p:nvSpPr>
+          <p:cNvPr id="5" name="Text 3"/>
+          <p:cNvSpPr/>
+          <p:nvPr/>
+        </p:nvSpPr>
+        <p:spPr>
+          <a:xfrm>
+            <a:off x="406301" y="4434929"/>
+            <a:ext cx="8498026" cy="213271"/>
+          </a:xfrm>
+          <a:prstGeom prst="rect">
+            <a:avLst/>
+          </a:prstGeom>
+          <a:noFill/>
+          <a:ln/>
+        </p:spPr>
+        <p:txBody>
+          <a:bodyPr wrap="square" lIns="0" tIns="0" rIns="0" bIns="0" rtlCol="0" anchor="t"/>
+          <a:lstStyle/>
+          <a:p>
+            <a:pPr algn="l" indent="0" marL="0">
+              <a:lnSpc>
+                <a:spcPts val="1680"/>
+              </a:lnSpc>
+              <a:spcBef>
+                <a:spcPts val="300"/>
+              </a:spcBef>
+              <a:spcAft>
+                <a:spcPts val="300"/>
+              </a:spcAft>
+              <a:buNone/>
+            </a:pPr>
+            <a:r>
+              <a:rPr lang="en-US" sz="1200" dirty="0">
+                <a:solidFill>
+                  <a:srgbClr val="2C2C2C"/>
+                </a:solidFill>
+                <a:latin typeface="Verdana" pitchFamily="34" charset="0"/>
+                <a:ea typeface="Verdana" pitchFamily="34" charset="-122"/>
+                <a:cs typeface="Verdana" pitchFamily="34" charset="-120"/>
+              </a:rPr>
+              <a:t>Primary ·  · IKS Curriculum</a:t>
+            </a:r>
+            <a:endParaRPr lang="en-US" sz="1200" dirty="0"/>
+          </a:p>
+        </p:txBody>
+      </p:sp>
+    </p:spTree>
+  </p:cSld>
+  <p:clrMapOvr>
+    <a:masterClrMapping/>
+  </p:clrMapOvr>
+</p:sld>
+</file>
+
+<file path=ppt/slides/slide12.xml><?xml version="1.0" encoding="utf-8"?>
+<p:sld xmlns:a="http://schemas.openxmlformats.org/drawingml/2006/main" xmlns:r="http://schemas.openxmlformats.org/officeDocument/2006/relationships" xmlns:p="http://schemas.openxmlformats.org/presentationml/2006/main">
+  <p:cSld name="Slide 12">
+    <p:bg>
+      <p:bgPr>
+        <a:solidFill>
+          <a:srgbClr val="FAF7F2"/>
+        </a:solidFill>
+      </p:bgPr>
+    </p:bg>
+    <p:spTree>
+      <p:nvGrpSpPr>
+        <p:cNvPr id="1" name=""/>
+        <p:cNvGrpSpPr/>
+        <p:nvPr/>
+      </p:nvGrpSpPr>
+      <p:grpSpPr>
+        <a:xfrm>
+          <a:off x="0" y="0"/>
+          <a:ext cx="0" cy="0"/>
+          <a:chOff x="0" y="0"/>
+          <a:chExt cx="0" cy="0"/>
+        </a:xfrm>
+      </p:grpSpPr>
+      <p:sp>
+        <p:nvSpPr>
+          <p:cNvPr id="2" name="Text 0"/>
+          <p:cNvSpPr/>
+          <p:nvPr/>
+        </p:nvSpPr>
+        <p:spPr>
+          <a:xfrm>
+            <a:off x="0" y="0"/>
+            <a:ext cx="9144000" cy="101501"/>
+          </a:xfrm>
+          <a:prstGeom prst="rect">
+            <a:avLst/>
+          </a:prstGeom>
+          <a:solidFill>
+            <a:srgbClr val="87A96B"/>
+          </a:solidFill>
+          <a:ln/>
+        </p:spPr>
+        <p:txBody>
+          <a:bodyPr wrap="square" rtlCol="0" anchor="ctr"/>
+          <a:lstStyle/>
+          <a:p>
+            <a:pPr indent="0" marL="0">
+              <a:buNone/>
+            </a:pPr>
+            <a:endParaRPr lang="en-US" dirty="0"/>
+          </a:p>
+        </p:txBody>
+      </p:sp>
+      <p:sp>
+        <p:nvSpPr>
+          <p:cNvPr id="3" name="Text 1"/>
+          <p:cNvSpPr/>
+          <p:nvPr/>
+        </p:nvSpPr>
+        <p:spPr>
+          <a:xfrm>
+            <a:off x="406301" y="457051"/>
+            <a:ext cx="8498026" cy="274290"/>
+          </a:xfrm>
+          <a:prstGeom prst="rect">
+            <a:avLst/>
+          </a:prstGeom>
+          <a:noFill/>
+          <a:ln/>
+        </p:spPr>
+        <p:txBody>
+          <a:bodyPr wrap="square" lIns="0" tIns="0" rIns="0" bIns="0" rtlCol="0" anchor="t"/>
+          <a:lstStyle/>
+          <a:p>
+            <a:pPr algn="l" indent="0" marL="0">
+              <a:lnSpc>
+                <a:spcPts val="2160"/>
+              </a:lnSpc>
+              <a:spcBef>
+                <a:spcPts val="600"/>
+              </a:spcBef>
+              <a:spcAft>
+                <a:spcPts val="800"/>
+              </a:spcAft>
+              <a:buNone/>
+            </a:pPr>
+            <a:r>
+              <a:rPr lang="en-US" sz="1800" b="1" dirty="0">
+                <a:solidFill>
+                  <a:srgbClr val="E07A5F"/>
+                </a:solidFill>
+                <a:latin typeface="Georgia" pitchFamily="34" charset="0"/>
+                <a:ea typeface="Georgia" pitchFamily="34" charset="-122"/>
+                <a:cs typeface="Georgia" pitchFamily="34" charset="-120"/>
+              </a:rPr>
+              <a:t>Differentiation</a:t>
+            </a:r>
+            <a:endParaRPr lang="en-US" sz="1800" dirty="0"/>
+          </a:p>
+        </p:txBody>
+      </p:sp>
+      <p:sp>
+        <p:nvSpPr>
+          <p:cNvPr id="4" name="Text 2"/>
+          <p:cNvSpPr/>
+          <p:nvPr/>
+        </p:nvSpPr>
+        <p:spPr>
+          <a:xfrm>
+            <a:off x="634901" y="883593"/>
+            <a:ext cx="8102798" cy="525661"/>
+          </a:xfrm>
+          <a:prstGeom prst="rect">
+            <a:avLst/>
+          </a:prstGeom>
+          <a:noFill/>
+          <a:ln/>
+        </p:spPr>
+        <p:txBody>
+          <a:bodyPr wrap="square" lIns="0" tIns="0" rIns="0" bIns="0" rtlCol="0" anchor="t"/>
+          <a:lstStyle/>
+          <a:p>
+            <a:pPr algn="l" marL="342900" indent="-342900">
+              <a:lnSpc>
+                <a:spcPts val="1620"/>
+              </a:lnSpc>
+              <a:spcAft>
+                <a:spcPts val="300"/>
+              </a:spcAft>
+              <a:buSzPct val="100000"/>
+              <a:buChar char="•"/>
+            </a:pPr>
+            <a:r>
+              <a:rPr lang="en-US" sz="1200" b="1" dirty="0">
+                <a:solidFill>
+                  <a:srgbClr val="2C2C2C"/>
+                </a:solidFill>
+                <a:latin typeface="Verdana" pitchFamily="34" charset="0"/>
+                <a:ea typeface="Verdana" pitchFamily="34" charset="-122"/>
+                <a:cs typeface="Verdana" pitchFamily="34" charset="-120"/>
+              </a:rPr>
+              <a:t>Tier up:</a:t>
+            </a:r>
+            <a:pPr algn="l" indent="0" marL="0">
+              <a:lnSpc>
+                <a:spcPts val="1620"/>
+              </a:lnSpc>
+              <a:spcAft>
+                <a:spcPts val="300"/>
+              </a:spcAft>
+              <a:buNone/>
+            </a:pPr>
+            <a:r>
+              <a:rPr lang="en-US" sz="1200" dirty="0">
+                <a:solidFill>
+                  <a:srgbClr val="2C2C2C"/>
+                </a:solidFill>
+                <a:latin typeface="Verdana" pitchFamily="34" charset="0"/>
+                <a:ea typeface="Verdana" pitchFamily="34" charset="-122"/>
+                <a:cs typeface="Verdana" pitchFamily="34" charset="-120"/>
+              </a:rPr>
+              <a:t> Add tree pose (vṛkṣāsana).</a:t>
+            </a:r>
+            <a:endParaRPr lang="en-US" sz="1200" dirty="0"/>
+          </a:p>
+          <a:p>
+            <a:pPr algn="l" marL="342900" indent="-342900">
+              <a:lnSpc>
+                <a:spcPts val="1620"/>
+              </a:lnSpc>
+              <a:spcAft>
+                <a:spcPts val="300"/>
+              </a:spcAft>
+              <a:buSzPct val="100000"/>
+              <a:buChar char="•"/>
+            </a:pPr>
+            <a:r>
+              <a:rPr lang="en-US" sz="1200" b="1" dirty="0">
+                <a:solidFill>
+                  <a:srgbClr val="2C2C2C"/>
+                </a:solidFill>
+                <a:latin typeface="Verdana" pitchFamily="34" charset="0"/>
+                <a:ea typeface="Verdana" pitchFamily="34" charset="-122"/>
+                <a:cs typeface="Verdana" pitchFamily="34" charset="-120"/>
+              </a:rPr>
+              <a:t>Tier down:</a:t>
+            </a:r>
+            <a:pPr algn="l" indent="0" marL="0">
+              <a:lnSpc>
+                <a:spcPts val="1620"/>
+              </a:lnSpc>
+              <a:spcAft>
+                <a:spcPts val="300"/>
+              </a:spcAft>
+              <a:buNone/>
+            </a:pPr>
+            <a:r>
+              <a:rPr lang="en-US" sz="1200" dirty="0">
+                <a:solidFill>
+                  <a:srgbClr val="2C2C2C"/>
+                </a:solidFill>
+                <a:latin typeface="Verdana" pitchFamily="34" charset="0"/>
+                <a:ea typeface="Verdana" pitchFamily="34" charset="-122"/>
+                <a:cs typeface="Verdana" pitchFamily="34" charset="-120"/>
+              </a:rPr>
+              <a:t> Just do mountain pose, no breath.</a:t>
+            </a:r>
+            <a:endParaRPr lang="en-US" sz="1200" dirty="0"/>
+          </a:p>
+        </p:txBody>
+      </p:sp>
+      <p:sp>
+        <p:nvSpPr>
+          <p:cNvPr id="5" name="Text 3"/>
+          <p:cNvSpPr/>
+          <p:nvPr/>
+        </p:nvSpPr>
+        <p:spPr>
+          <a:xfrm>
+            <a:off x="406301" y="4434929"/>
+            <a:ext cx="8498026" cy="213271"/>
+          </a:xfrm>
+          <a:prstGeom prst="rect">
+            <a:avLst/>
+          </a:prstGeom>
+          <a:noFill/>
+          <a:ln/>
+        </p:spPr>
+        <p:txBody>
+          <a:bodyPr wrap="square" lIns="0" tIns="0" rIns="0" bIns="0" rtlCol="0" anchor="t"/>
+          <a:lstStyle/>
+          <a:p>
+            <a:pPr algn="l" indent="0" marL="0">
+              <a:lnSpc>
+                <a:spcPts val="1680"/>
+              </a:lnSpc>
+              <a:spcBef>
+                <a:spcPts val="300"/>
+              </a:spcBef>
+              <a:spcAft>
+                <a:spcPts val="300"/>
+              </a:spcAft>
+              <a:buNone/>
+            </a:pPr>
+            <a:r>
+              <a:rPr lang="en-US" sz="1200" dirty="0">
+                <a:solidFill>
+                  <a:srgbClr val="2C2C2C"/>
+                </a:solidFill>
+                <a:latin typeface="Verdana" pitchFamily="34" charset="0"/>
+                <a:ea typeface="Verdana" pitchFamily="34" charset="-122"/>
+                <a:cs typeface="Verdana" pitchFamily="34" charset="-120"/>
+              </a:rPr>
+              <a:t>Primary ·  · IKS Curriculum</a:t>
+            </a:r>
+            <a:endParaRPr lang="en-US" sz="1200" dirty="0"/>
+          </a:p>
+        </p:txBody>
+      </p:sp>
+    </p:spTree>
+  </p:cSld>
+  <p:clrMapOvr>
+    <a:masterClrMapping/>
+  </p:clrMapOvr>
+</p:sld>
+</file>
+
+<file path=ppt/slides/slide13.xml><?xml version="1.0" encoding="utf-8"?>
+<p:sld xmlns:a="http://schemas.openxmlformats.org/drawingml/2006/main" xmlns:r="http://schemas.openxmlformats.org/officeDocument/2006/relationships" xmlns:p="http://schemas.openxmlformats.org/presentationml/2006/main">
+  <p:cSld name="Slide 13">
+    <p:bg>
+      <p:bgPr>
+        <a:solidFill>
+          <a:srgbClr val="FAF7F2"/>
+        </a:solidFill>
+      </p:bgPr>
+    </p:bg>
+    <p:spTree>
+      <p:nvGrpSpPr>
+        <p:cNvPr id="1" name=""/>
+        <p:cNvGrpSpPr/>
+        <p:nvPr/>
+      </p:nvGrpSpPr>
+      <p:grpSpPr>
+        <a:xfrm>
+          <a:off x="0" y="0"/>
+          <a:ext cx="0" cy="0"/>
+          <a:chOff x="0" y="0"/>
+          <a:chExt cx="0" cy="0"/>
+        </a:xfrm>
+      </p:grpSpPr>
+      <p:sp>
+        <p:nvSpPr>
+          <p:cNvPr id="2" name="Text 0"/>
+          <p:cNvSpPr/>
+          <p:nvPr/>
+        </p:nvSpPr>
+        <p:spPr>
+          <a:xfrm>
+            <a:off x="0" y="0"/>
+            <a:ext cx="9144000" cy="101501"/>
+          </a:xfrm>
+          <a:prstGeom prst="rect">
+            <a:avLst/>
+          </a:prstGeom>
+          <a:solidFill>
+            <a:srgbClr val="87A96B"/>
+          </a:solidFill>
+          <a:ln/>
+        </p:spPr>
+        <p:txBody>
+          <a:bodyPr wrap="square" rtlCol="0" anchor="ctr"/>
+          <a:lstStyle/>
+          <a:p>
+            <a:pPr indent="0" marL="0">
+              <a:buNone/>
+            </a:pPr>
+            <a:endParaRPr lang="en-US" dirty="0"/>
+          </a:p>
+        </p:txBody>
+      </p:sp>
+      <p:sp>
+        <p:nvSpPr>
+          <p:cNvPr id="3" name="Text 1"/>
+          <p:cNvSpPr/>
+          <p:nvPr/>
+        </p:nvSpPr>
+        <p:spPr>
+          <a:xfrm>
+            <a:off x="406301" y="457051"/>
+            <a:ext cx="8498026" cy="274290"/>
+          </a:xfrm>
+          <a:prstGeom prst="rect">
+            <a:avLst/>
+          </a:prstGeom>
+          <a:noFill/>
+          <a:ln/>
+        </p:spPr>
+        <p:txBody>
+          <a:bodyPr wrap="square" lIns="0" tIns="0" rIns="0" bIns="0" rtlCol="0" anchor="t"/>
+          <a:lstStyle/>
+          <a:p>
+            <a:pPr algn="l" indent="0" marL="0">
+              <a:lnSpc>
+                <a:spcPts val="2160"/>
+              </a:lnSpc>
+              <a:spcBef>
+                <a:spcPts val="600"/>
+              </a:spcBef>
+              <a:spcAft>
+                <a:spcPts val="800"/>
+              </a:spcAft>
+              <a:buNone/>
+            </a:pPr>
+            <a:r>
+              <a:rPr lang="en-US" sz="1800" b="1" dirty="0">
+                <a:solidFill>
+                  <a:srgbClr val="E07A5F"/>
+                </a:solidFill>
+                <a:latin typeface="Georgia" pitchFamily="34" charset="0"/>
+                <a:ea typeface="Georgia" pitchFamily="34" charset="-122"/>
+                <a:cs typeface="Georgia" pitchFamily="34" charset="-120"/>
+              </a:rPr>
+              <a:t>Teacher notes</a:t>
+            </a:r>
+            <a:endParaRPr lang="en-US" sz="1800" dirty="0"/>
+          </a:p>
+        </p:txBody>
+      </p:sp>
+      <p:sp>
+        <p:nvSpPr>
+          <p:cNvPr id="4" name="Text 2"/>
+          <p:cNvSpPr/>
+          <p:nvPr/>
+        </p:nvSpPr>
+        <p:spPr>
+          <a:xfrm>
+            <a:off x="634901" y="883593"/>
+            <a:ext cx="8102798" cy="281880"/>
+          </a:xfrm>
+          <a:prstGeom prst="rect">
+            <a:avLst/>
+          </a:prstGeom>
+          <a:noFill/>
+          <a:ln/>
+        </p:spPr>
+        <p:txBody>
+          <a:bodyPr wrap="square" lIns="0" tIns="0" rIns="0" bIns="0" rtlCol="0" anchor="t"/>
+          <a:lstStyle/>
+          <a:p>
+            <a:pPr algn="l" marL="342900" indent="-342900">
+              <a:lnSpc>
+                <a:spcPts val="1620"/>
+              </a:lnSpc>
+              <a:spcAft>
+                <a:spcPts val="300"/>
+              </a:spcAft>
+              <a:buSzPct val="100000"/>
+              <a:buChar char="•"/>
+            </a:pPr>
+            <a:r>
+              <a:rPr lang="en-US" sz="1200" dirty="0">
+                <a:solidFill>
+                  <a:srgbClr val="2C2C2C"/>
+                </a:solidFill>
+                <a:latin typeface="Verdana" pitchFamily="34" charset="0"/>
+                <a:ea typeface="Verdana" pitchFamily="34" charset="-122"/>
+                <a:cs typeface="Verdana" pitchFamily="34" charset="-120"/>
+              </a:rPr>
+              <a:t>Module 8 is the FULL yoga module. Today is just a taste.</a:t>
             </a:r>
             <a:endParaRPr lang="en-US" sz="1200" dirty="0"/>
           </a:p>
@@ -2679,7 +3167,7 @@
                 <a:ea typeface="Georgia" pitchFamily="34" charset="-122"/>
                 <a:cs typeface="Georgia" pitchFamily="34" charset="-120"/>
               </a:rPr>
-              <a:t>Materials</a:t>
+              <a:t>Goal</a:t>
             </a:r>
             <a:endParaRPr lang="en-US" sz="1800" dirty="0"/>
           </a:p>
@@ -2727,7 +3215,7 @@
                 <a:ea typeface="Verdana" pitchFamily="34" charset="-122"/>
                 <a:cs typeface="Verdana" pitchFamily="34" charset="-120"/>
               </a:rPr>
-              <a:t>– Floor space (no shoes)</a:t>
+              <a:t>Children try ONE yoga pose with breath co-ordination.</a:t>
             </a:r>
             <a:endParaRPr lang="en-US" sz="1200" dirty="0"/>
           </a:p>
@@ -2885,7 +3373,7 @@
                 <a:ea typeface="Georgia" pitchFamily="34" charset="-122"/>
                 <a:cs typeface="Georgia" pitchFamily="34" charset="-120"/>
               </a:rPr>
-              <a:t>Flow</a:t>
+              <a:t>Materials</a:t>
             </a:r>
             <a:endParaRPr lang="en-US" sz="1800" dirty="0"/>
           </a:p>
@@ -2894,6 +3382,52 @@
       <p:sp>
         <p:nvSpPr>
           <p:cNvPr id="4" name="Text 2"/>
+          <p:cNvSpPr/>
+          <p:nvPr/>
+        </p:nvSpPr>
+        <p:spPr>
+          <a:xfrm>
+            <a:off x="634901" y="883593"/>
+            <a:ext cx="8102798" cy="281880"/>
+          </a:xfrm>
+          <a:prstGeom prst="rect">
+            <a:avLst/>
+          </a:prstGeom>
+          <a:noFill/>
+          <a:ln/>
+        </p:spPr>
+        <p:txBody>
+          <a:bodyPr wrap="square" lIns="0" tIns="0" rIns="0" bIns="0" rtlCol="0" anchor="t"/>
+          <a:lstStyle/>
+          <a:p>
+            <a:pPr algn="l" marL="342900" indent="-342900">
+              <a:lnSpc>
+                <a:spcPts val="1620"/>
+              </a:lnSpc>
+              <a:spcAft>
+                <a:spcPts val="300"/>
+              </a:spcAft>
+              <a:buSzPct val="100000"/>
+              <a:buChar char="•"/>
+            </a:pPr>
+            <a:r>
+              <a:rPr lang="en-US" sz="1200" dirty="0">
+                <a:solidFill>
+                  <a:srgbClr val="2C2C2C"/>
+                </a:solidFill>
+                <a:latin typeface="Verdana" pitchFamily="34" charset="0"/>
+                <a:ea typeface="Verdana" pitchFamily="34" charset="-122"/>
+                <a:cs typeface="Verdana" pitchFamily="34" charset="-120"/>
+              </a:rPr>
+              <a:t>Floor space (no shoes)</a:t>
+            </a:r>
+            <a:endParaRPr lang="en-US" sz="1200" dirty="0"/>
+          </a:p>
+        </p:txBody>
+      </p:sp>
+      <p:sp>
+        <p:nvSpPr>
+          <p:cNvPr id="5" name="Text 3"/>
           <p:cNvSpPr/>
           <p:nvPr/>
         </p:nvSpPr>
@@ -3043,7 +3577,7 @@
                 <a:ea typeface="Georgia" pitchFamily="34" charset="-122"/>
                 <a:cs typeface="Georgia" pitchFamily="34" charset="-120"/>
               </a:rPr>
-              <a:t>Settle + chant (3 min)</a:t>
+              <a:t>Flow</a:t>
             </a:r>
             <a:endParaRPr lang="en-US" sz="1800" dirty="0"/>
           </a:p>
@@ -3201,7 +3735,7 @@
                 <a:ea typeface="Georgia" pitchFamily="34" charset="-122"/>
                 <a:cs typeface="Georgia" pitchFamily="34" charset="-120"/>
               </a:rPr>
-              <a:t>Story (5 min)</a:t>
+              <a:t>Settle + chant (3 min)</a:t>
             </a:r>
             <a:endParaRPr lang="en-US" sz="1800" dirty="0"/>
           </a:p>
@@ -3210,102 +3744,6 @@
       <p:sp>
         <p:nvSpPr>
           <p:cNvPr id="4" name="Text 2"/>
-          <p:cNvSpPr/>
-          <p:nvPr/>
-        </p:nvSpPr>
-        <p:spPr>
-          <a:xfrm>
-            <a:off x="406301" y="870942"/>
-            <a:ext cx="8498026" cy="426541"/>
-          </a:xfrm>
-          <a:prstGeom prst="rect">
-            <a:avLst/>
-          </a:prstGeom>
-          <a:noFill/>
-          <a:ln/>
-        </p:spPr>
-        <p:txBody>
-          <a:bodyPr wrap="square" lIns="0" tIns="0" rIns="0" bIns="0" rtlCol="0" anchor="t"/>
-          <a:lstStyle/>
-          <a:p>
-            <a:pPr algn="l" indent="0" marL="0">
-              <a:lnSpc>
-                <a:spcPts val="1680"/>
-              </a:lnSpc>
-              <a:spcBef>
-                <a:spcPts val="300"/>
-              </a:spcBef>
-              <a:spcAft>
-                <a:spcPts val="300"/>
-              </a:spcAft>
-              <a:buNone/>
-            </a:pPr>
-            <a:r>
-              <a:rPr lang="en-US" sz="1200" i="1" dirty="0">
-                <a:solidFill>
-                  <a:srgbClr val="2C2C2C"/>
-                </a:solidFill>
-                <a:latin typeface="Verdana" pitchFamily="34" charset="0"/>
-                <a:ea typeface="Verdana" pitchFamily="34" charset="-122"/>
-                <a:cs typeface="Verdana" pitchFamily="34" charset="-120"/>
-              </a:rPr>
-              <a:t>"Yoga is a very old practice from India. Yoga means 'joining' — joining your body, your breath, and your mind."</a:t>
-            </a:r>
-            <a:endParaRPr lang="en-US" sz="1200" dirty="0"/>
-          </a:p>
-        </p:txBody>
-      </p:sp>
-      <p:sp>
-        <p:nvSpPr>
-          <p:cNvPr id="5" name="Text 3"/>
-          <p:cNvSpPr/>
-          <p:nvPr/>
-        </p:nvSpPr>
-        <p:spPr>
-          <a:xfrm>
-            <a:off x="406301" y="1373684"/>
-            <a:ext cx="8498026" cy="213271"/>
-          </a:xfrm>
-          <a:prstGeom prst="rect">
-            <a:avLst/>
-          </a:prstGeom>
-          <a:noFill/>
-          <a:ln/>
-        </p:spPr>
-        <p:txBody>
-          <a:bodyPr wrap="square" lIns="0" tIns="0" rIns="0" bIns="0" rtlCol="0" anchor="t"/>
-          <a:lstStyle/>
-          <a:p>
-            <a:pPr algn="l" indent="0" marL="0">
-              <a:lnSpc>
-                <a:spcPts val="1680"/>
-              </a:lnSpc>
-              <a:spcBef>
-                <a:spcPts val="300"/>
-              </a:spcBef>
-              <a:spcAft>
-                <a:spcPts val="300"/>
-              </a:spcAft>
-              <a:buNone/>
-            </a:pPr>
-            <a:r>
-              <a:rPr lang="en-US" sz="1200" i="1" dirty="0">
-                <a:solidFill>
-                  <a:srgbClr val="2C2C2C"/>
-                </a:solidFill>
-                <a:latin typeface="Verdana" pitchFamily="34" charset="0"/>
-                <a:ea typeface="Verdana" pitchFamily="34" charset="-122"/>
-                <a:cs typeface="Verdana" pitchFamily="34" charset="-120"/>
-              </a:rPr>
-              <a:t>"Today we try ONE pose: tāḍāsana — mountain pose."</a:t>
-            </a:r>
-            <a:endParaRPr lang="en-US" sz="1200" dirty="0"/>
-          </a:p>
-        </p:txBody>
-      </p:sp>
-      <p:sp>
-        <p:nvSpPr>
-          <p:cNvPr id="6" name="Text 4"/>
           <p:cNvSpPr/>
           <p:nvPr/>
         </p:nvSpPr>
@@ -3455,7 +3893,7 @@
                 <a:ea typeface="Georgia" pitchFamily="34" charset="-122"/>
                 <a:cs typeface="Georgia" pitchFamily="34" charset="-120"/>
               </a:rPr>
-              <a:t>Practice (15 min)</a:t>
+              <a:t>Story (5 min)</a:t>
             </a:r>
             <a:endParaRPr lang="en-US" sz="1800" dirty="0"/>
           </a:p>
@@ -3470,7 +3908,7 @@
         <p:spPr>
           <a:xfrm>
             <a:off x="406301" y="870942"/>
-            <a:ext cx="8498026" cy="213271"/>
+            <a:ext cx="8498026" cy="426541"/>
           </a:xfrm>
           <a:prstGeom prst="rect">
             <a:avLst/>
@@ -3495,7 +3933,7 @@
               <a:buNone/>
             </a:pPr>
             <a:r>
-              <a:rPr lang="en-US" sz="1200" dirty="0">
+              <a:rPr lang="en-US" sz="1200" i="1" dirty="0">
                 <a:solidFill>
                   <a:srgbClr val="2C2C2C"/>
                 </a:solidFill>
@@ -3503,7 +3941,7 @@
                 <a:ea typeface="Verdana" pitchFamily="34" charset="-122"/>
                 <a:cs typeface="Verdana" pitchFamily="34" charset="-120"/>
               </a:rPr>
-              <a:t>– Stand tall. Feet firm on floor.</a:t>
+              <a:t>"Yoga is a very old practice from India. Yoga means 'joining' — joining your body, your breath, and your mind."</a:t>
             </a:r>
             <a:endParaRPr lang="en-US" sz="1200" dirty="0"/>
           </a:p>
@@ -3517,8 +3955,8 @@
         </p:nvSpPr>
         <p:spPr>
           <a:xfrm>
-            <a:off x="634901" y="1173063"/>
-            <a:ext cx="8102798" cy="525661"/>
+            <a:off x="406301" y="1373684"/>
+            <a:ext cx="8498026" cy="213271"/>
           </a:xfrm>
           <a:prstGeom prst="rect">
             <a:avLst/>
@@ -3530,15 +3968,17 @@
           <a:bodyPr wrap="square" lIns="0" tIns="0" rIns="0" bIns="0" rtlCol="0" anchor="t"/>
           <a:lstStyle/>
           <a:p>
-            <a:pPr algn="l" marL="342900" indent="-342900">
-              <a:lnSpc>
-                <a:spcPts val="1620"/>
-              </a:lnSpc>
-              <a:spcAft>
-                <a:spcPts val="300"/>
-              </a:spcAft>
-              <a:buSzPct val="100000"/>
-              <a:buChar char="•"/>
+            <a:pPr algn="l" indent="0" marL="0">
+              <a:lnSpc>
+                <a:spcPts val="1680"/>
+              </a:lnSpc>
+              <a:spcBef>
+                <a:spcPts val="300"/>
+              </a:spcBef>
+              <a:spcAft>
+                <a:spcPts val="300"/>
+              </a:spcAft>
+              <a:buNone/>
             </a:pPr>
             <a:r>
               <a:rPr lang="en-US" sz="1200" i="1" dirty="0">
@@ -3549,181 +3989,15 @@
                 <a:ea typeface="Verdana" pitchFamily="34" charset="-122"/>
                 <a:cs typeface="Verdana" pitchFamily="34" charset="-120"/>
               </a:rPr>
-              <a:t>"Pretend a string is gently pulling the top of your head up."</a:t>
+              <a:t>"Today we try ONE pose: tāḍāsana — mountain pose."</a:t>
             </a:r>
             <a:endParaRPr lang="en-US" sz="1200" dirty="0"/>
           </a:p>
-          <a:p>
-            <a:pPr algn="l" marL="342900" indent="-342900">
-              <a:lnSpc>
-                <a:spcPts val="1620"/>
-              </a:lnSpc>
-              <a:spcAft>
-                <a:spcPts val="300"/>
-              </a:spcAft>
-              <a:buSzPct val="100000"/>
-              <a:buChar char="•"/>
-            </a:pPr>
-            <a:r>
-              <a:rPr lang="en-US" sz="1200" i="1" dirty="0">
-                <a:solidFill>
-                  <a:srgbClr val="2C2C2C"/>
-                </a:solidFill>
-                <a:latin typeface="Verdana" pitchFamily="34" charset="0"/>
-                <a:ea typeface="Verdana" pitchFamily="34" charset="-122"/>
-                <a:cs typeface="Verdana" pitchFamily="34" charset="-120"/>
-              </a:rPr>
-              <a:t>"Take 3 slow breaths."</a:t>
-            </a:r>
-            <a:endParaRPr lang="en-US" sz="1200" dirty="0"/>
-          </a:p>
         </p:txBody>
       </p:sp>
       <p:sp>
         <p:nvSpPr>
           <p:cNvPr id="6" name="Text 4"/>
-          <p:cNvSpPr/>
-          <p:nvPr/>
-        </p:nvSpPr>
-        <p:spPr>
-          <a:xfrm>
-            <a:off x="406301" y="1787575"/>
-            <a:ext cx="8498026" cy="213271"/>
-          </a:xfrm>
-          <a:prstGeom prst="rect">
-            <a:avLst/>
-          </a:prstGeom>
-          <a:noFill/>
-          <a:ln/>
-        </p:spPr>
-        <p:txBody>
-          <a:bodyPr wrap="square" lIns="0" tIns="0" rIns="0" bIns="0" rtlCol="0" anchor="t"/>
-          <a:lstStyle/>
-          <a:p>
-            <a:pPr algn="l" indent="0" marL="0">
-              <a:lnSpc>
-                <a:spcPts val="1680"/>
-              </a:lnSpc>
-              <a:spcBef>
-                <a:spcPts val="300"/>
-              </a:spcBef>
-              <a:spcAft>
-                <a:spcPts val="300"/>
-              </a:spcAft>
-              <a:buNone/>
-            </a:pPr>
-            <a:r>
-              <a:rPr lang="en-US" sz="1200" dirty="0">
-                <a:solidFill>
-                  <a:srgbClr val="2C2C2C"/>
-                </a:solidFill>
-                <a:latin typeface="Verdana" pitchFamily="34" charset="0"/>
-                <a:ea typeface="Verdana" pitchFamily="34" charset="-122"/>
-                <a:cs typeface="Verdana" pitchFamily="34" charset="-120"/>
-              </a:rPr>
-              <a:t>– Hold for 30 seconds. Release. Repeat 3 times.</a:t>
-            </a:r>
-            <a:endParaRPr lang="en-US" sz="1200" dirty="0"/>
-          </a:p>
-        </p:txBody>
-      </p:sp>
-      <p:sp>
-        <p:nvSpPr>
-          <p:cNvPr id="7" name="Text 5"/>
-          <p:cNvSpPr/>
-          <p:nvPr/>
-        </p:nvSpPr>
-        <p:spPr>
-          <a:xfrm>
-            <a:off x="406301" y="2077045"/>
-            <a:ext cx="8498026" cy="426541"/>
-          </a:xfrm>
-          <a:prstGeom prst="rect">
-            <a:avLst/>
-          </a:prstGeom>
-          <a:noFill/>
-          <a:ln/>
-        </p:spPr>
-        <p:txBody>
-          <a:bodyPr wrap="square" lIns="0" tIns="0" rIns="0" bIns="0" rtlCol="0" anchor="t"/>
-          <a:lstStyle/>
-          <a:p>
-            <a:pPr algn="l" indent="0" marL="0">
-              <a:lnSpc>
-                <a:spcPts val="1680"/>
-              </a:lnSpc>
-              <a:spcBef>
-                <a:spcPts val="300"/>
-              </a:spcBef>
-              <a:spcAft>
-                <a:spcPts val="300"/>
-              </a:spcAft>
-              <a:buNone/>
-            </a:pPr>
-            <a:r>
-              <a:rPr lang="en-US" sz="1200" dirty="0">
-                <a:solidFill>
-                  <a:srgbClr val="2C2C2C"/>
-                </a:solidFill>
-                <a:latin typeface="Verdana" pitchFamily="34" charset="0"/>
-                <a:ea typeface="Verdana" pitchFamily="34" charset="-122"/>
-                <a:cs typeface="Verdana" pitchFamily="34" charset="-120"/>
-              </a:rPr>
-              <a:t>Then introduce </a:t>
-            </a:r>
-            <a:pPr algn="l" indent="0" marL="0">
-              <a:lnSpc>
-                <a:spcPts val="1680"/>
-              </a:lnSpc>
-              <a:spcBef>
-                <a:spcPts val="300"/>
-              </a:spcBef>
-              <a:spcAft>
-                <a:spcPts val="300"/>
-              </a:spcAft>
-              <a:buNone/>
-            </a:pPr>
-            <a:r>
-              <a:rPr lang="en-US" sz="1200" b="1" dirty="0">
-                <a:solidFill>
-                  <a:srgbClr val="2C2C2C"/>
-                </a:solidFill>
-                <a:latin typeface="Verdana" pitchFamily="34" charset="0"/>
-                <a:ea typeface="Verdana" pitchFamily="34" charset="-122"/>
-                <a:cs typeface="Verdana" pitchFamily="34" charset="-120"/>
-              </a:rPr>
-              <a:t>bumblebee breath</a:t>
-            </a:r>
-            <a:pPr algn="l" indent="0" marL="0">
-              <a:lnSpc>
-                <a:spcPts val="1680"/>
-              </a:lnSpc>
-              <a:spcBef>
-                <a:spcPts val="300"/>
-              </a:spcBef>
-              <a:spcAft>
-                <a:spcPts val="300"/>
-              </a:spcAft>
-              <a:buNone/>
-            </a:pPr>
-            <a:r>
-              <a:rPr lang="en-US" sz="1200" dirty="0">
-                <a:solidFill>
-                  <a:srgbClr val="2C2C2C"/>
-                </a:solidFill>
-                <a:latin typeface="Verdana" pitchFamily="34" charset="0"/>
-                <a:ea typeface="Verdana" pitchFamily="34" charset="-122"/>
-                <a:cs typeface="Verdana" pitchFamily="34" charset="-120"/>
-              </a:rPr>
-              <a:t>: – Sit cross-legged. Take a slow breath in. – Breathe out humming — "mmmmmmmm" — like a bumblebee. – Do 5 times.</a:t>
-            </a:r>
-            <a:endParaRPr lang="en-US" sz="1200" dirty="0"/>
-          </a:p>
-        </p:txBody>
-      </p:sp>
-      <p:sp>
-        <p:nvSpPr>
-          <p:cNvPr id="8" name="Text 6"/>
           <p:cNvSpPr/>
           <p:nvPr/>
         </p:nvSpPr>
@@ -3873,7 +4147,7 @@
                 <a:ea typeface="Georgia" pitchFamily="34" charset="-122"/>
                 <a:cs typeface="Georgia" pitchFamily="34" charset="-120"/>
               </a:rPr>
-              <a:t>Show + chant (5 min)</a:t>
+              <a:t>Practice (15 min)</a:t>
             </a:r>
             <a:endParaRPr lang="en-US" sz="1800" dirty="0"/>
           </a:p>
@@ -3888,7 +4162,7 @@
         <p:spPr>
           <a:xfrm>
             <a:off x="634901" y="883593"/>
-            <a:ext cx="8102798" cy="525661"/>
+            <a:ext cx="8102798" cy="1013222"/>
           </a:xfrm>
           <a:prstGeom prst="rect">
             <a:avLst/>
@@ -3911,7 +4185,7 @@
               <a:buChar char="•"/>
             </a:pPr>
             <a:r>
-              <a:rPr lang="en-US" sz="1200" i="1" dirty="0">
+              <a:rPr lang="en-US" sz="1200" dirty="0">
                 <a:solidFill>
                   <a:srgbClr val="2C2C2C"/>
                 </a:solidFill>
@@ -3919,7 +4193,7 @@
                 <a:ea typeface="Verdana" pitchFamily="34" charset="-122"/>
                 <a:cs typeface="Verdana" pitchFamily="34" charset="-120"/>
               </a:rPr>
-              <a:t>"How did your body feel after the mountain?"</a:t>
+              <a:t>Stand tall. Feet firm on floor.</a:t>
             </a:r>
             <a:endParaRPr lang="en-US" sz="1200" dirty="0"/>
           </a:p>
@@ -3943,47 +4217,23 @@
                 <a:ea typeface="Verdana" pitchFamily="34" charset="-122"/>
                 <a:cs typeface="Verdana" pitchFamily="34" charset="-120"/>
               </a:rPr>
-              <a:t>"How did your head feel after the bumblebee?"</a:t>
+              <a:t>"Pretend a string is gently pulling the top of your head up."</a:t>
             </a:r>
             <a:endParaRPr lang="en-US" sz="1200" dirty="0"/>
           </a:p>
-        </p:txBody>
-      </p:sp>
-      <p:sp>
-        <p:nvSpPr>
-          <p:cNvPr id="5" name="Text 3"/>
-          <p:cNvSpPr/>
-          <p:nvPr/>
-        </p:nvSpPr>
-        <p:spPr>
-          <a:xfrm>
-            <a:off x="406301" y="1498104"/>
-            <a:ext cx="8498026" cy="213271"/>
-          </a:xfrm>
-          <a:prstGeom prst="rect">
-            <a:avLst/>
-          </a:prstGeom>
-          <a:noFill/>
-          <a:ln/>
-        </p:spPr>
-        <p:txBody>
-          <a:bodyPr wrap="square" lIns="0" tIns="0" rIns="0" bIns="0" rtlCol="0" anchor="t"/>
-          <a:lstStyle/>
-          <a:p>
-            <a:pPr algn="l" indent="0" marL="0">
-              <a:lnSpc>
-                <a:spcPts val="1680"/>
-              </a:lnSpc>
-              <a:spcBef>
-                <a:spcPts val="300"/>
-              </a:spcBef>
-              <a:spcAft>
-                <a:spcPts val="300"/>
-              </a:spcAft>
-              <a:buNone/>
-            </a:pPr>
-            <a:r>
-              <a:rPr lang="en-US" sz="1200" dirty="0">
+          <a:p>
+            <a:pPr algn="l" marL="342900" indent="-342900">
+              <a:lnSpc>
+                <a:spcPts val="1620"/>
+              </a:lnSpc>
+              <a:spcAft>
+                <a:spcPts val="300"/>
+              </a:spcAft>
+              <a:buSzPct val="100000"/>
+              <a:buChar char="•"/>
+            </a:pPr>
+            <a:r>
+              <a:rPr lang="en-US" sz="1200" i="1" dirty="0">
                 <a:solidFill>
                   <a:srgbClr val="2C2C2C"/>
                 </a:solidFill>
@@ -3991,15 +4241,39 @@
                 <a:ea typeface="Verdana" pitchFamily="34" charset="-122"/>
                 <a:cs typeface="Verdana" pitchFamily="34" charset="-120"/>
               </a:rPr>
-              <a:t>– Daily chant.</a:t>
+              <a:t>"Take 3 slow breaths."</a:t>
             </a:r>
             <a:endParaRPr lang="en-US" sz="1200" dirty="0"/>
           </a:p>
-        </p:txBody>
-      </p:sp>
-      <p:sp>
-        <p:nvSpPr>
-          <p:cNvPr id="6" name="Text 4"/>
+          <a:p>
+            <a:pPr algn="l" marL="342900" indent="-342900">
+              <a:lnSpc>
+                <a:spcPts val="1620"/>
+              </a:lnSpc>
+              <a:spcAft>
+                <a:spcPts val="300"/>
+              </a:spcAft>
+              <a:buSzPct val="100000"/>
+              <a:buChar char="•"/>
+            </a:pPr>
+            <a:r>
+              <a:rPr lang="en-US" sz="1200" dirty="0">
+                <a:solidFill>
+                  <a:srgbClr val="2C2C2C"/>
+                </a:solidFill>
+                <a:latin typeface="Verdana" pitchFamily="34" charset="0"/>
+                <a:ea typeface="Verdana" pitchFamily="34" charset="-122"/>
+                <a:cs typeface="Verdana" pitchFamily="34" charset="-120"/>
+              </a:rPr>
+              <a:t>Hold for 30 seconds. Release. Repeat 3 times.</a:t>
+            </a:r>
+            <a:endParaRPr lang="en-US" sz="1200" dirty="0"/>
+          </a:p>
+        </p:txBody>
+      </p:sp>
+      <p:sp>
+        <p:nvSpPr>
+          <p:cNvPr id="5" name="Text 3"/>
           <p:cNvSpPr/>
           <p:nvPr/>
         </p:nvSpPr>
@@ -4149,7 +4423,7 @@
                 <a:ea typeface="Georgia" pitchFamily="34" charset="-122"/>
                 <a:cs typeface="Georgia" pitchFamily="34" charset="-120"/>
               </a:rPr>
-              <a:t>Wrap-up (2 min)</a:t>
+              <a:t>Practice (15 min) (cont.)</a:t>
             </a:r>
             <a:endParaRPr lang="en-US" sz="1800" dirty="0"/>
           </a:p>
@@ -4163,8 +4437,8 @@
         </p:nvSpPr>
         <p:spPr>
           <a:xfrm>
-            <a:off x="634901" y="883593"/>
-            <a:ext cx="8102798" cy="487561"/>
+            <a:off x="406301" y="870942"/>
+            <a:ext cx="8498026" cy="213271"/>
           </a:xfrm>
           <a:prstGeom prst="rect">
             <a:avLst/>
@@ -4176,18 +4450,20 @@
           <a:bodyPr wrap="square" lIns="0" tIns="0" rIns="0" bIns="0" rtlCol="0" anchor="t"/>
           <a:lstStyle/>
           <a:p>
-            <a:pPr algn="l" marL="342900" indent="-342900">
-              <a:lnSpc>
-                <a:spcPts val="1620"/>
-              </a:lnSpc>
-              <a:spcAft>
-                <a:spcPts val="300"/>
-              </a:spcAft>
-              <a:buSzPct val="100000"/>
-              <a:buChar char="•"/>
-            </a:pPr>
-            <a:r>
-              <a:rPr lang="en-US" sz="1200" i="1" dirty="0">
+            <a:pPr algn="l" indent="0" marL="0">
+              <a:lnSpc>
+                <a:spcPts val="1680"/>
+              </a:lnSpc>
+              <a:spcBef>
+                <a:spcPts val="300"/>
+              </a:spcBef>
+              <a:spcAft>
+                <a:spcPts val="300"/>
+              </a:spcAft>
+              <a:buNone/>
+            </a:pPr>
+            <a:r>
+              <a:rPr lang="en-US" sz="1200" dirty="0">
                 <a:solidFill>
                   <a:srgbClr val="2C2C2C"/>
                 </a:solidFill>
@@ -4195,7 +4471,53 @@
                 <a:ea typeface="Verdana" pitchFamily="34" charset="-122"/>
                 <a:cs typeface="Verdana" pitchFamily="34" charset="-120"/>
               </a:rPr>
-              <a:t>"When you feel angry or sad — try mountain pose for 30 seconds. Or 3 bumblebee breaths. Yoga is a TOOL you can carry with you."</a:t>
+              <a:t>Then introduce </a:t>
+            </a:r>
+            <a:pPr algn="l" indent="0" marL="0">
+              <a:lnSpc>
+                <a:spcPts val="1680"/>
+              </a:lnSpc>
+              <a:spcBef>
+                <a:spcPts val="300"/>
+              </a:spcBef>
+              <a:spcAft>
+                <a:spcPts val="300"/>
+              </a:spcAft>
+              <a:buNone/>
+            </a:pPr>
+            <a:r>
+              <a:rPr lang="en-US" sz="1200" b="1" dirty="0">
+                <a:solidFill>
+                  <a:srgbClr val="2C2C2C"/>
+                </a:solidFill>
+                <a:latin typeface="Verdana" pitchFamily="34" charset="0"/>
+                <a:ea typeface="Verdana" pitchFamily="34" charset="-122"/>
+                <a:cs typeface="Verdana" pitchFamily="34" charset="-120"/>
+              </a:rPr>
+              <a:t>bumblebee breath</a:t>
+            </a:r>
+            <a:pPr algn="l" indent="0" marL="0">
+              <a:lnSpc>
+                <a:spcPts val="1680"/>
+              </a:lnSpc>
+              <a:spcBef>
+                <a:spcPts val="300"/>
+              </a:spcBef>
+              <a:spcAft>
+                <a:spcPts val="300"/>
+              </a:spcAft>
+              <a:buNone/>
+            </a:pPr>
+            <a:r>
+              <a:rPr lang="en-US" sz="1200" dirty="0">
+                <a:solidFill>
+                  <a:srgbClr val="2C2C2C"/>
+                </a:solidFill>
+                <a:latin typeface="Verdana" pitchFamily="34" charset="0"/>
+                <a:ea typeface="Verdana" pitchFamily="34" charset="-122"/>
+                <a:cs typeface="Verdana" pitchFamily="34" charset="-120"/>
+              </a:rPr>
+              <a:t>:</a:t>
             </a:r>
             <a:endParaRPr lang="en-US" sz="1200" dirty="0"/>
           </a:p>
@@ -4204,6 +4526,100 @@
       <p:sp>
         <p:nvSpPr>
           <p:cNvPr id="5" name="Text 3"/>
+          <p:cNvSpPr/>
+          <p:nvPr/>
+        </p:nvSpPr>
+        <p:spPr>
+          <a:xfrm>
+            <a:off x="634901" y="1173063"/>
+            <a:ext cx="8102798" cy="769441"/>
+          </a:xfrm>
+          <a:prstGeom prst="rect">
+            <a:avLst/>
+          </a:prstGeom>
+          <a:noFill/>
+          <a:ln/>
+        </p:spPr>
+        <p:txBody>
+          <a:bodyPr wrap="square" lIns="0" tIns="0" rIns="0" bIns="0" rtlCol="0" anchor="t"/>
+          <a:lstStyle/>
+          <a:p>
+            <a:pPr algn="l" marL="342900" indent="-342900">
+              <a:lnSpc>
+                <a:spcPts val="1620"/>
+              </a:lnSpc>
+              <a:spcAft>
+                <a:spcPts val="300"/>
+              </a:spcAft>
+              <a:buSzPct val="100000"/>
+              <a:buChar char="•"/>
+            </a:pPr>
+            <a:r>
+              <a:rPr lang="en-US" sz="1200" dirty="0">
+                <a:solidFill>
+                  <a:srgbClr val="2C2C2C"/>
+                </a:solidFill>
+                <a:latin typeface="Verdana" pitchFamily="34" charset="0"/>
+                <a:ea typeface="Verdana" pitchFamily="34" charset="-122"/>
+                <a:cs typeface="Verdana" pitchFamily="34" charset="-120"/>
+              </a:rPr>
+              <a:t>Sit cross-legged. Take a slow breath in.</a:t>
+            </a:r>
+            <a:endParaRPr lang="en-US" sz="1200" dirty="0"/>
+          </a:p>
+          <a:p>
+            <a:pPr algn="l" marL="342900" indent="-342900">
+              <a:lnSpc>
+                <a:spcPts val="1620"/>
+              </a:lnSpc>
+              <a:spcAft>
+                <a:spcPts val="300"/>
+              </a:spcAft>
+              <a:buSzPct val="100000"/>
+              <a:buChar char="•"/>
+            </a:pPr>
+            <a:r>
+              <a:rPr lang="en-US" sz="1200" dirty="0">
+                <a:solidFill>
+                  <a:srgbClr val="2C2C2C"/>
+                </a:solidFill>
+                <a:latin typeface="Verdana" pitchFamily="34" charset="0"/>
+                <a:ea typeface="Verdana" pitchFamily="34" charset="-122"/>
+                <a:cs typeface="Verdana" pitchFamily="34" charset="-120"/>
+              </a:rPr>
+              <a:t>Breathe out humming — "mmmmmmmm" — like a bumblebee.</a:t>
+            </a:r>
+            <a:endParaRPr lang="en-US" sz="1200" dirty="0"/>
+          </a:p>
+          <a:p>
+            <a:pPr algn="l" marL="342900" indent="-342900">
+              <a:lnSpc>
+                <a:spcPts val="1620"/>
+              </a:lnSpc>
+              <a:spcAft>
+                <a:spcPts val="300"/>
+              </a:spcAft>
+              <a:buSzPct val="100000"/>
+              <a:buChar char="•"/>
+            </a:pPr>
+            <a:r>
+              <a:rPr lang="en-US" sz="1200" dirty="0">
+                <a:solidFill>
+                  <a:srgbClr val="2C2C2C"/>
+                </a:solidFill>
+                <a:latin typeface="Verdana" pitchFamily="34" charset="0"/>
+                <a:ea typeface="Verdana" pitchFamily="34" charset="-122"/>
+                <a:cs typeface="Verdana" pitchFamily="34" charset="-120"/>
+              </a:rPr>
+              <a:t>Do 5 times.</a:t>
+            </a:r>
+            <a:endParaRPr lang="en-US" sz="1200" dirty="0"/>
+          </a:p>
+        </p:txBody>
+      </p:sp>
+      <p:sp>
+        <p:nvSpPr>
+          <p:cNvPr id="6" name="Text 4"/>
           <p:cNvSpPr/>
           <p:nvPr/>
         </p:nvSpPr>
@@ -4353,7 +4769,7 @@
                 <a:ea typeface="Georgia" pitchFamily="34" charset="-122"/>
                 <a:cs typeface="Georgia" pitchFamily="34" charset="-120"/>
               </a:rPr>
-              <a:t>Homework</a:t>
+              <a:t>Show + chant (5 min)</a:t>
             </a:r>
             <a:endParaRPr lang="en-US" sz="1800" dirty="0"/>
           </a:p>
@@ -4367,8 +4783,8 @@
         </p:nvSpPr>
         <p:spPr>
           <a:xfrm>
-            <a:off x="406301" y="870942"/>
-            <a:ext cx="8498026" cy="213271"/>
+            <a:off x="634901" y="883593"/>
+            <a:ext cx="8102798" cy="769441"/>
           </a:xfrm>
           <a:prstGeom prst="rect">
             <a:avLst/>
@@ -4380,20 +4796,18 @@
           <a:bodyPr wrap="square" lIns="0" tIns="0" rIns="0" bIns="0" rtlCol="0" anchor="t"/>
           <a:lstStyle/>
           <a:p>
-            <a:pPr algn="l" indent="0" marL="0">
-              <a:lnSpc>
-                <a:spcPts val="1680"/>
-              </a:lnSpc>
-              <a:spcBef>
-                <a:spcPts val="300"/>
-              </a:spcBef>
-              <a:spcAft>
-                <a:spcPts val="300"/>
-              </a:spcAft>
-              <a:buNone/>
-            </a:pPr>
-            <a:r>
-              <a:rPr lang="en-US" sz="1200" dirty="0">
+            <a:pPr algn="l" marL="342900" indent="-342900">
+              <a:lnSpc>
+                <a:spcPts val="1620"/>
+              </a:lnSpc>
+              <a:spcAft>
+                <a:spcPts val="300"/>
+              </a:spcAft>
+              <a:buSzPct val="100000"/>
+              <a:buChar char="•"/>
+            </a:pPr>
+            <a:r>
+              <a:rPr lang="en-US" sz="1200" i="1" dirty="0">
                 <a:solidFill>
                   <a:srgbClr val="2C2C2C"/>
                 </a:solidFill>
@@ -4401,7 +4815,55 @@
                 <a:ea typeface="Verdana" pitchFamily="34" charset="-122"/>
                 <a:cs typeface="Verdana" pitchFamily="34" charset="-120"/>
               </a:rPr>
-              <a:t>– Stand like a mountain for 30 seconds before brushing your teeth tomorrow.</a:t>
+              <a:t>"How did your body feel after the mountain?"</a:t>
+            </a:r>
+            <a:endParaRPr lang="en-US" sz="1200" dirty="0"/>
+          </a:p>
+          <a:p>
+            <a:pPr algn="l" marL="342900" indent="-342900">
+              <a:lnSpc>
+                <a:spcPts val="1620"/>
+              </a:lnSpc>
+              <a:spcAft>
+                <a:spcPts val="300"/>
+              </a:spcAft>
+              <a:buSzPct val="100000"/>
+              <a:buChar char="•"/>
+            </a:pPr>
+            <a:r>
+              <a:rPr lang="en-US" sz="1200" i="1" dirty="0">
+                <a:solidFill>
+                  <a:srgbClr val="2C2C2C"/>
+                </a:solidFill>
+                <a:latin typeface="Verdana" pitchFamily="34" charset="0"/>
+                <a:ea typeface="Verdana" pitchFamily="34" charset="-122"/>
+                <a:cs typeface="Verdana" pitchFamily="34" charset="-120"/>
+              </a:rPr>
+              <a:t>"How did your head feel after the bumblebee?"</a:t>
+            </a:r>
+            <a:endParaRPr lang="en-US" sz="1200" dirty="0"/>
+          </a:p>
+          <a:p>
+            <a:pPr algn="l" marL="342900" indent="-342900">
+              <a:lnSpc>
+                <a:spcPts val="1620"/>
+              </a:lnSpc>
+              <a:spcAft>
+                <a:spcPts val="300"/>
+              </a:spcAft>
+              <a:buSzPct val="100000"/>
+              <a:buChar char="•"/>
+            </a:pPr>
+            <a:r>
+              <a:rPr lang="en-US" sz="1200" dirty="0">
+                <a:solidFill>
+                  <a:srgbClr val="2C2C2C"/>
+                </a:solidFill>
+                <a:latin typeface="Verdana" pitchFamily="34" charset="0"/>
+                <a:ea typeface="Verdana" pitchFamily="34" charset="-122"/>
+                <a:cs typeface="Verdana" pitchFamily="34" charset="-120"/>
+              </a:rPr>
+              <a:t>Daily chant.</a:t>
             </a:r>
             <a:endParaRPr lang="en-US" sz="1200" dirty="0"/>
           </a:p>
